--- a/slides/05_games.pptx
+++ b/slides/05_games.pptx
@@ -5555,7 +5555,7 @@
             <a:fld id="{46E2045A-045A-4BC7-A4D3-1395440B1C3D}" type="datetimeFigureOut">
               <a:rPr lang="en-US" smtClean="0"/>
               <a:pPr/>
-              <a:t>12/15/2025</a:t>
+              <a:t>4/6/2026</a:t>
             </a:fld>
             <a:endParaRPr lang="en-US"/>
           </a:p>
@@ -41517,7 +41517,7 @@
             </a:r>
             <a:r>
               <a:rPr lang="en-US" sz="2400" dirty="0"/>
-              <a:t>: Many playouts are performed for very bad moves.</a:t>
+              <a:t>: Many playouts are performed for very bad moves. This is especially a problem for random playout policies.</a:t>
             </a:r>
           </a:p>
           <a:p>
@@ -41531,23 +41531,45 @@
               <a:buNone/>
             </a:pPr>
             <a:r>
+              <a:rPr lang="en-US" sz="2400" b="1" dirty="0"/>
+              <a:t>Idea</a:t>
+            </a:r>
+            <a:r>
               <a:rPr lang="en-US" sz="2400" dirty="0"/>
-              <a:t>Idea: Focus on </a:t>
+              <a:t>: </a:t>
+            </a:r>
+          </a:p>
+          <a:p>
+            <a:pPr marL="457200" indent="-457200">
+              <a:buFont typeface="+mj-lt"/>
+              <a:buAutoNum type="arabicPeriod"/>
+            </a:pPr>
+            <a:r>
+              <a:rPr lang="en-US" sz="2400" dirty="0"/>
+              <a:t>Create a </a:t>
             </a:r>
             <a:r>
               <a:rPr lang="en-US" sz="2400" b="1" dirty="0"/>
-              <a:t>sequences of good moves</a:t>
+              <a:t>depth-limited game tree.</a:t>
+            </a:r>
+          </a:p>
+          <a:p>
+            <a:pPr marL="457200" indent="-457200">
+              <a:buFont typeface="+mj-lt"/>
+              <a:buAutoNum type="arabicPeriod"/>
+            </a:pPr>
+            <a:r>
+              <a:rPr lang="en-US" sz="2400" dirty="0"/>
+              <a:t>Start the next (random) playout at the best leaf-node using the </a:t>
+            </a:r>
+            <a:r>
+              <a:rPr lang="en-US" sz="2400" b="1" dirty="0"/>
+              <a:t>UCB1</a:t>
             </a:r>
             <a:r>
               <a:rPr lang="en-US" sz="2400" dirty="0"/>
-              <a:t>.</a:t>
+              <a:t> selection criterion.</a:t>
             </a:r>
-          </a:p>
-          <a:p>
-            <a:pPr marL="0" indent="0">
-              <a:buNone/>
-            </a:pPr>
-            <a:endParaRPr lang="en-US" sz="2400" b="1" dirty="0"/>
           </a:p>
           <a:p>
             <a:pPr marL="0" indent="0">
@@ -41555,39 +41577,7 @@
             </a:pPr>
             <a:r>
               <a:rPr lang="en-US" sz="2400" dirty="0"/>
-              <a:t>We will introduce </a:t>
-            </a:r>
-          </a:p>
-          <a:p>
-            <a:pPr marL="457200" indent="-457200">
-              <a:buFont typeface="+mj-lt"/>
-              <a:buAutoNum type="alphaLcParenR"/>
-            </a:pPr>
-            <a:r>
-              <a:rPr lang="en-US" sz="2400" b="1" dirty="0"/>
-              <a:t>UCB1</a:t>
-            </a:r>
-            <a:r>
-              <a:rPr lang="en-US" sz="2400" dirty="0"/>
-              <a:t> to select a good move to play out next.</a:t>
-            </a:r>
-          </a:p>
-          <a:p>
-            <a:pPr marL="457200" indent="-457200">
-              <a:buFont typeface="+mj-lt"/>
-              <a:buAutoNum type="alphaLcParenR"/>
-            </a:pPr>
-            <a:r>
-              <a:rPr lang="en-US" sz="2400" dirty="0"/>
-              <a:t>A </a:t>
-            </a:r>
-            <a:r>
-              <a:rPr lang="en-US" sz="2400" b="1" dirty="0"/>
-              <a:t>tree</a:t>
-            </a:r>
-            <a:r>
-              <a:rPr lang="en-US" sz="2400" dirty="0"/>
-              <a:t> to deal with short sequences of moves.</a:t>
+              <a:t>We will start with discussion step 2.</a:t>
             </a:r>
           </a:p>
         </p:txBody>
@@ -42166,7 +42156,7 @@
             </a:r>
             <a:r>
               <a:rPr lang="en-US" dirty="0"/>
-              <a:t>: Pure Monte Carlo Search with a random playout policy spends a lot of time to create playouts for bad move.</a:t>
+              <a:t>: Pure Monte Carlo Search with a random playout policy will explore all moves equally and spend a lot of time to create playouts for bad move.</a:t>
             </a:r>
           </a:p>
           <a:p>
@@ -42586,18 +42576,11 @@
               <a:rPr lang="en-US" sz="4000" dirty="0"/>
               <a:t>Upper Confidence Bound 1 (UCB1) </a:t>
             </a:r>
-            <a:br>
-              <a:rPr lang="en-US" sz="4000" dirty="0"/>
-            </a:br>
-            <a:r>
-              <a:rPr lang="en-US" sz="4000" dirty="0"/>
-              <a:t>Applied to Trees (UCT)</a:t>
-            </a:r>
           </a:p>
         </p:txBody>
       </p:sp>
-      <mc:AlternateContent xmlns:mc="http://schemas.openxmlformats.org/markup-compatibility/2006" xmlns:a14="http://schemas.microsoft.com/office/drawing/2010/main">
-        <mc:Choice Requires="a14">
+      <mc:AlternateContent xmlns:mc="http://schemas.openxmlformats.org/markup-compatibility/2006">
+        <mc:Choice xmlns:a14="http://schemas.microsoft.com/office/drawing/2010/main" Requires="a14">
           <p:sp>
             <p:nvSpPr>
               <p:cNvPr id="8" name="Rectangle 7">
@@ -42612,8 +42595,8 @@
             </p:nvSpPr>
             <p:spPr>
               <a:xfrm>
-                <a:off x="767386" y="2708456"/>
-                <a:ext cx="6635534" cy="1094467"/>
+                <a:off x="1143000" y="2425763"/>
+                <a:ext cx="5834033" cy="969176"/>
               </a:xfrm>
               <a:prstGeom prst="rect">
                 <a:avLst/>
@@ -42628,13 +42611,13 @@
                 <a14:m>
                   <m:oMath xmlns:m="http://schemas.openxmlformats.org/officeDocument/2006/math">
                     <m:r>
-                      <a:rPr lang="en-US" sz="3200" i="1" smtClean="0">
+                      <a:rPr lang="en-US" sz="2800" i="1" smtClean="0">
                         <a:latin typeface="Cambria Math" panose="02040503050406030204" pitchFamily="18" charset="0"/>
                       </a:rPr>
                       <m:t>𝑈𝐶𝐵</m:t>
                     </m:r>
                     <m:r>
-                      <a:rPr lang="en-US" sz="3200" i="1" smtClean="0">
+                      <a:rPr lang="en-US" sz="2800" i="1" smtClean="0">
                         <a:latin typeface="Cambria Math" panose="02040503050406030204" pitchFamily="18" charset="0"/>
                       </a:rPr>
                       <m:t>1</m:t>
@@ -42642,14 +42625,14 @@
                     <m:d>
                       <m:dPr>
                         <m:ctrlPr>
-                          <a:rPr lang="en-US" sz="3200" i="1">
+                          <a:rPr lang="en-US" sz="2800" i="1">
                             <a:latin typeface="Cambria Math" panose="02040503050406030204" pitchFamily="18" charset="0"/>
                           </a:rPr>
                         </m:ctrlPr>
                       </m:dPr>
                       <m:e>
                         <m:r>
-                          <a:rPr lang="en-US" sz="3200" i="1">
+                          <a:rPr lang="en-US" sz="2800" i="1">
                             <a:latin typeface="Cambria Math" panose="02040503050406030204" pitchFamily="18" charset="0"/>
                           </a:rPr>
                           <m:t>𝑛</m:t>
@@ -42657,7 +42640,7 @@
                       </m:e>
                     </m:d>
                     <m:r>
-                      <a:rPr lang="en-US" sz="3200" i="1">
+                      <a:rPr lang="en-US" sz="2800" i="1">
                         <a:latin typeface="Cambria Math" panose="02040503050406030204" pitchFamily="18" charset="0"/>
                       </a:rPr>
                       <m:t>=</m:t>
@@ -42665,14 +42648,14 @@
                     <m:f>
                       <m:fPr>
                         <m:ctrlPr>
-                          <a:rPr lang="en-US" sz="3200" i="1">
+                          <a:rPr lang="en-US" sz="2800" i="1">
                             <a:latin typeface="Cambria Math" panose="02040503050406030204" pitchFamily="18" charset="0"/>
                           </a:rPr>
                         </m:ctrlPr>
                       </m:fPr>
                       <m:num>
                         <m:r>
-                          <a:rPr lang="en-US" sz="3200" i="1">
+                          <a:rPr lang="en-US" sz="2800" i="1">
                             <a:latin typeface="Cambria Math" panose="02040503050406030204" pitchFamily="18" charset="0"/>
                           </a:rPr>
                           <m:t>𝑈</m:t>
@@ -42680,14 +42663,14 @@
                         <m:d>
                           <m:dPr>
                             <m:ctrlPr>
-                              <a:rPr lang="en-US" sz="3200" i="1">
+                              <a:rPr lang="en-US" sz="2800" i="1">
                                 <a:latin typeface="Cambria Math" panose="02040503050406030204" pitchFamily="18" charset="0"/>
                               </a:rPr>
                             </m:ctrlPr>
                           </m:dPr>
                           <m:e>
                             <m:r>
-                              <a:rPr lang="en-US" sz="3200" i="1">
+                              <a:rPr lang="en-US" sz="2800" i="1">
                                 <a:latin typeface="Cambria Math" panose="02040503050406030204" pitchFamily="18" charset="0"/>
                               </a:rPr>
                               <m:t>𝑛</m:t>
@@ -42697,7 +42680,7 @@
                       </m:num>
                       <m:den>
                         <m:r>
-                          <a:rPr lang="en-US" sz="3200" i="1">
+                          <a:rPr lang="en-US" sz="2800" i="1">
                             <a:latin typeface="Cambria Math" panose="02040503050406030204" pitchFamily="18" charset="0"/>
                           </a:rPr>
                           <m:t>𝑁</m:t>
@@ -42705,14 +42688,14 @@
                         <m:d>
                           <m:dPr>
                             <m:ctrlPr>
-                              <a:rPr lang="en-US" sz="3200" i="1">
+                              <a:rPr lang="en-US" sz="2800" i="1">
                                 <a:latin typeface="Cambria Math" panose="02040503050406030204" pitchFamily="18" charset="0"/>
                               </a:rPr>
                             </m:ctrlPr>
                           </m:dPr>
                           <m:e>
                             <m:r>
-                              <a:rPr lang="en-US" sz="3200" i="1">
+                              <a:rPr lang="en-US" sz="2800" i="1">
                                 <a:latin typeface="Cambria Math" panose="02040503050406030204" pitchFamily="18" charset="0"/>
                               </a:rPr>
                               <m:t>𝑛</m:t>
@@ -42722,13 +42705,13 @@
                       </m:den>
                     </m:f>
                     <m:r>
-                      <a:rPr lang="en-US" sz="3200" i="1">
+                      <a:rPr lang="en-US" sz="2800" i="1">
                         <a:latin typeface="Cambria Math" panose="02040503050406030204" pitchFamily="18" charset="0"/>
                       </a:rPr>
                       <m:t>+</m:t>
                     </m:r>
                     <m:r>
-                      <a:rPr lang="en-US" sz="3200" i="1">
+                      <a:rPr lang="en-US" sz="2800" i="1">
                         <a:latin typeface="Cambria Math" panose="02040503050406030204" pitchFamily="18" charset="0"/>
                       </a:rPr>
                       <m:t>𝐶</m:t>
@@ -42737,7 +42720,7 @@
                       <m:radPr>
                         <m:degHide m:val="on"/>
                         <m:ctrlPr>
-                          <a:rPr lang="en-US" sz="3200" i="1">
+                          <a:rPr lang="en-US" sz="2800" i="1">
                             <a:latin typeface="Cambria Math" panose="02040503050406030204" pitchFamily="18" charset="0"/>
                           </a:rPr>
                         </m:ctrlPr>
@@ -42747,7 +42730,7 @@
                         <m:f>
                           <m:fPr>
                             <m:ctrlPr>
-                              <a:rPr lang="en-US" sz="3200" i="1">
+                              <a:rPr lang="en-US" sz="2800" i="1">
                                 <a:latin typeface="Cambria Math" panose="02040503050406030204" pitchFamily="18" charset="0"/>
                               </a:rPr>
                             </m:ctrlPr>
@@ -42756,7 +42739,7 @@
                             <m:func>
                               <m:funcPr>
                                 <m:ctrlPr>
-                                  <a:rPr lang="en-US" sz="3200" i="1">
+                                  <a:rPr lang="en-US" sz="2800" i="1">
                                     <a:latin typeface="Cambria Math" panose="02040503050406030204" pitchFamily="18" charset="0"/>
                                   </a:rPr>
                                 </m:ctrlPr>
@@ -42766,7 +42749,7 @@
                                   <m:rPr>
                                     <m:sty m:val="p"/>
                                   </m:rPr>
-                                  <a:rPr lang="en-US" sz="3200">
+                                  <a:rPr lang="en-US" sz="2800">
                                     <a:latin typeface="Cambria Math" panose="02040503050406030204" pitchFamily="18" charset="0"/>
                                   </a:rPr>
                                   <m:t>log</m:t>
@@ -42774,19 +42757,19 @@
                               </m:fName>
                               <m:e>
                                 <m:r>
-                                  <a:rPr lang="en-US" sz="3200" i="1">
+                                  <a:rPr lang="en-US" sz="2800" i="1">
                                     <a:latin typeface="Cambria Math" panose="02040503050406030204" pitchFamily="18" charset="0"/>
                                   </a:rPr>
                                   <m:t>𝑁</m:t>
                                 </m:r>
                                 <m:r>
-                                  <a:rPr lang="en-US" sz="3200" i="1">
+                                  <a:rPr lang="en-US" sz="2800" i="1">
                                     <a:latin typeface="Cambria Math" panose="02040503050406030204" pitchFamily="18" charset="0"/>
                                   </a:rPr>
                                   <m:t>(</m:t>
                                 </m:r>
                                 <m:r>
-                                  <a:rPr lang="en-US" sz="3200" i="1">
+                                  <a:rPr lang="en-US" sz="2800" i="1">
                                     <a:latin typeface="Cambria Math" panose="02040503050406030204" pitchFamily="18" charset="0"/>
                                   </a:rPr>
                                   <m:t>𝑃𝑎𝑟𝑒𝑛𝑡</m:t>
@@ -42794,14 +42777,14 @@
                                 <m:d>
                                   <m:dPr>
                                     <m:ctrlPr>
-                                      <a:rPr lang="en-US" sz="3200" i="1">
+                                      <a:rPr lang="en-US" sz="2800" i="1">
                                         <a:latin typeface="Cambria Math" panose="02040503050406030204" pitchFamily="18" charset="0"/>
                                       </a:rPr>
                                     </m:ctrlPr>
                                   </m:dPr>
                                   <m:e>
                                     <m:r>
-                                      <a:rPr lang="en-US" sz="3200" i="1">
+                                      <a:rPr lang="en-US" sz="2800" i="1">
                                         <a:latin typeface="Cambria Math" panose="02040503050406030204" pitchFamily="18" charset="0"/>
                                       </a:rPr>
                                       <m:t>𝑛</m:t>
@@ -42809,7 +42792,7 @@
                                   </m:e>
                                 </m:d>
                                 <m:r>
-                                  <a:rPr lang="en-US" sz="3200" i="1">
+                                  <a:rPr lang="en-US" sz="2800" i="1">
                                     <a:latin typeface="Cambria Math" panose="02040503050406030204" pitchFamily="18" charset="0"/>
                                   </a:rPr>
                                   <m:t>)</m:t>
@@ -42819,25 +42802,25 @@
                           </m:num>
                           <m:den>
                             <m:r>
-                              <a:rPr lang="en-US" sz="3200" i="1">
+                              <a:rPr lang="en-US" sz="2800" i="1">
                                 <a:latin typeface="Cambria Math" panose="02040503050406030204" pitchFamily="18" charset="0"/>
                               </a:rPr>
                               <m:t>𝑁</m:t>
                             </m:r>
                             <m:r>
-                              <a:rPr lang="en-US" sz="3200" i="1">
+                              <a:rPr lang="en-US" sz="2800" i="1">
                                 <a:latin typeface="Cambria Math" panose="02040503050406030204" pitchFamily="18" charset="0"/>
                               </a:rPr>
                               <m:t>(</m:t>
                             </m:r>
                             <m:r>
-                              <a:rPr lang="en-US" sz="3200" i="1">
+                              <a:rPr lang="en-US" sz="2800" i="1">
                                 <a:latin typeface="Cambria Math" panose="02040503050406030204" pitchFamily="18" charset="0"/>
                               </a:rPr>
                               <m:t>𝑛</m:t>
                             </m:r>
                             <m:r>
-                              <a:rPr lang="en-US" sz="3200" i="1">
+                              <a:rPr lang="en-US" sz="2800" i="1">
                                 <a:latin typeface="Cambria Math" panose="02040503050406030204" pitchFamily="18" charset="0"/>
                               </a:rPr>
                               <m:t>)</m:t>
@@ -42849,14 +42832,14 @@
                   </m:oMath>
                 </a14:m>
                 <a:r>
-                  <a:rPr lang="en-US" sz="3200" dirty="0"/>
+                  <a:rPr lang="en-US" sz="2800" dirty="0"/>
                   <a:t> </a:t>
                 </a:r>
               </a:p>
             </p:txBody>
           </p:sp>
         </mc:Choice>
-        <mc:Fallback xmlns="">
+        <mc:Fallback>
           <p:sp>
             <p:nvSpPr>
               <p:cNvPr id="8" name="Rectangle 7">
@@ -42873,8 +42856,8 @@
             </p:nvSpPr>
             <p:spPr>
               <a:xfrm>
-                <a:off x="767386" y="2708456"/>
-                <a:ext cx="6635534" cy="1094467"/>
+                <a:off x="1143000" y="2425763"/>
+                <a:ext cx="5834033" cy="969176"/>
               </a:xfrm>
               <a:prstGeom prst="rect">
                 <a:avLst/>
@@ -42901,8 +42884,8 @@
           </p:sp>
         </mc:Fallback>
       </mc:AlternateContent>
-      <mc:AlternateContent xmlns:mc="http://schemas.openxmlformats.org/markup-compatibility/2006" xmlns:a14="http://schemas.microsoft.com/office/drawing/2010/main">
-        <mc:Choice Requires="a14">
+      <mc:AlternateContent xmlns:mc="http://schemas.openxmlformats.org/markup-compatibility/2006">
+        <mc:Choice xmlns:a14="http://schemas.microsoft.com/office/drawing/2010/main" Requires="a14">
           <p:sp>
             <p:nvSpPr>
               <p:cNvPr id="6" name="Rectangle 5">
@@ -42917,8 +42900,8 @@
             </p:nvSpPr>
             <p:spPr>
               <a:xfrm>
-                <a:off x="3276600" y="5031384"/>
-                <a:ext cx="5456878" cy="923330"/>
+                <a:off x="3733800" y="5128412"/>
+                <a:ext cx="4856329" cy="861774"/>
               </a:xfrm>
               <a:prstGeom prst="rect">
                 <a:avLst/>
@@ -42933,7 +42916,7 @@
                 <a14:m>
                   <m:oMath xmlns:m="http://schemas.openxmlformats.org/officeDocument/2006/math">
                     <m:r>
-                      <a:rPr lang="en-US" sz="1800" b="0" i="1" smtClean="0">
+                      <a:rPr lang="en-US" sz="1600" b="0" i="1" smtClean="0">
                         <a:latin typeface="Cambria Math" panose="02040503050406030204" pitchFamily="18" charset="0"/>
                       </a:rPr>
                       <m:t>𝑛</m:t>
@@ -42941,10 +42924,10 @@
                   </m:oMath>
                 </a14:m>
                 <a:r>
-                  <a:rPr lang="en-US" dirty="0"/>
+                  <a:rPr lang="en-US" sz="1600" dirty="0"/>
                   <a:t>         … node in the game tree</a:t>
                 </a:r>
-                <a:endParaRPr lang="en-US" i="1" dirty="0">
+                <a:endParaRPr lang="en-US" sz="1600" i="1" dirty="0">
                   <a:latin typeface="Cambria Math" panose="02040503050406030204" pitchFamily="18" charset="0"/>
                 </a:endParaRPr>
               </a:p>
@@ -42952,7 +42935,7 @@
                 <a14:m>
                   <m:oMath xmlns:m="http://schemas.openxmlformats.org/officeDocument/2006/math">
                     <m:r>
-                      <a:rPr lang="en-US" i="1">
+                      <a:rPr lang="en-US" sz="1600" i="1">
                         <a:latin typeface="Cambria Math" panose="02040503050406030204" pitchFamily="18" charset="0"/>
                       </a:rPr>
                       <m:t>𝑈</m:t>
@@ -42960,14 +42943,14 @@
                     <m:d>
                       <m:dPr>
                         <m:ctrlPr>
-                          <a:rPr lang="en-US" i="1">
+                          <a:rPr lang="en-US" sz="1600" i="1">
                             <a:latin typeface="Cambria Math" panose="02040503050406030204" pitchFamily="18" charset="0"/>
                           </a:rPr>
                         </m:ctrlPr>
                       </m:dPr>
                       <m:e>
                         <m:r>
-                          <a:rPr lang="en-US" i="1">
+                          <a:rPr lang="en-US" sz="1600" i="1">
                             <a:latin typeface="Cambria Math" panose="02040503050406030204" pitchFamily="18" charset="0"/>
                           </a:rPr>
                           <m:t>𝑛</m:t>
@@ -42977,7 +42960,7 @@
                   </m:oMath>
                 </a14:m>
                 <a:r>
-                  <a:rPr lang="en-US" dirty="0"/>
+                  <a:rPr lang="en-US" sz="1600" dirty="0"/>
                   <a:t>  … total utility of all playouts going through node n</a:t>
                 </a:r>
               </a:p>
@@ -42985,7 +42968,7 @@
                 <a14:m>
                   <m:oMath xmlns:m="http://schemas.openxmlformats.org/officeDocument/2006/math">
                     <m:r>
-                      <a:rPr lang="en-US" i="1">
+                      <a:rPr lang="en-US" sz="1600" i="1">
                         <a:latin typeface="Cambria Math" panose="02040503050406030204" pitchFamily="18" charset="0"/>
                       </a:rPr>
                       <m:t>𝑁</m:t>
@@ -42993,14 +42976,14 @@
                     <m:d>
                       <m:dPr>
                         <m:ctrlPr>
-                          <a:rPr lang="en-US" i="1">
+                          <a:rPr lang="en-US" sz="1600" i="1">
                             <a:latin typeface="Cambria Math" panose="02040503050406030204" pitchFamily="18" charset="0"/>
                           </a:rPr>
                         </m:ctrlPr>
                       </m:dPr>
                       <m:e>
                         <m:r>
-                          <a:rPr lang="en-US" i="1">
+                          <a:rPr lang="en-US" sz="1600" i="1">
                             <a:latin typeface="Cambria Math" panose="02040503050406030204" pitchFamily="18" charset="0"/>
                           </a:rPr>
                           <m:t>𝑛</m:t>
@@ -43010,14 +42993,14 @@
                   </m:oMath>
                 </a14:m>
                 <a:r>
-                  <a:rPr lang="en-US" dirty="0"/>
+                  <a:rPr lang="en-US" sz="1600" dirty="0"/>
                   <a:t>  … number of playouts through n</a:t>
                 </a:r>
               </a:p>
             </p:txBody>
           </p:sp>
         </mc:Choice>
-        <mc:Fallback xmlns="">
+        <mc:Fallback>
           <p:sp>
             <p:nvSpPr>
               <p:cNvPr id="6" name="Rectangle 5">
@@ -43034,8 +43017,8 @@
             </p:nvSpPr>
             <p:spPr>
               <a:xfrm>
-                <a:off x="3276600" y="5031384"/>
-                <a:ext cx="5456878" cy="923330"/>
+                <a:off x="3733800" y="5128412"/>
+                <a:ext cx="4856329" cy="861774"/>
               </a:xfrm>
               <a:prstGeom prst="rect">
                 <a:avLst/>
@@ -43043,7 +43026,7 @@
               <a:blipFill>
                 <a:blip r:embed="rId3"/>
                 <a:stretch>
-                  <a:fillRect t="-3289" b="-9211"/>
+                  <a:fillRect t="-2113" b="-4225"/>
                 </a:stretch>
               </a:blipFill>
             </p:spPr>
@@ -43079,13 +43062,13 @@
         </p:nvSpPr>
         <p:spPr>
           <a:xfrm>
-            <a:off x="1903663" y="4080797"/>
-            <a:ext cx="1752600" cy="762000"/>
+            <a:off x="1903663" y="3775998"/>
+            <a:ext cx="1752600" cy="1177002"/>
           </a:xfrm>
           <a:prstGeom prst="wedgeRectCallout">
             <a:avLst>
-              <a:gd name="adj1" fmla="val 31952"/>
-              <a:gd name="adj2" fmla="val -97597"/>
+              <a:gd name="adj1" fmla="val 30648"/>
+              <a:gd name="adj2" fmla="val -85944"/>
             </a:avLst>
           </a:prstGeom>
         </p:spPr>
@@ -43109,29 +43092,29 @@
           <a:p>
             <a:pPr algn="ctr"/>
             <a:r>
-              <a:rPr lang="en-US" dirty="0"/>
+              <a:rPr lang="en-US" sz="1600" dirty="0"/>
               <a:t>Average utility</a:t>
             </a:r>
             <a:br>
-              <a:rPr lang="en-US" dirty="0"/>
+              <a:rPr lang="en-US" sz="1600" dirty="0"/>
             </a:br>
             <a:r>
-              <a:rPr lang="en-US" dirty="0"/>
+              <a:rPr lang="en-US" sz="1600" dirty="0"/>
               <a:t>(=</a:t>
             </a:r>
             <a:r>
-              <a:rPr lang="en-US" b="1" dirty="0"/>
+              <a:rPr lang="en-US" sz="1600" b="1" dirty="0"/>
               <a:t>exploitation</a:t>
             </a:r>
             <a:r>
-              <a:rPr lang="en-US" dirty="0"/>
+              <a:rPr lang="en-US" sz="1600" dirty="0"/>
               <a:t>)</a:t>
             </a:r>
           </a:p>
         </p:txBody>
       </p:sp>
-      <mc:AlternateContent xmlns:mc="http://schemas.openxmlformats.org/markup-compatibility/2006" xmlns:a14="http://schemas.microsoft.com/office/drawing/2010/main">
-        <mc:Choice Requires="a14">
+      <mc:AlternateContent xmlns:mc="http://schemas.openxmlformats.org/markup-compatibility/2006">
+        <mc:Choice xmlns:a14="http://schemas.microsoft.com/office/drawing/2010/main" Requires="a14">
           <p:sp>
             <p:nvSpPr>
               <p:cNvPr id="5" name="Speech Bubble: Rectangle 4">
@@ -43149,13 +43132,13 @@
             </p:nvSpPr>
             <p:spPr>
               <a:xfrm>
-                <a:off x="3048000" y="1770192"/>
-                <a:ext cx="3505200" cy="762000"/>
+                <a:off x="3048000" y="1465393"/>
+                <a:ext cx="3124200" cy="762000"/>
               </a:xfrm>
               <a:prstGeom prst="wedgeRectCallout">
                 <a:avLst>
-                  <a:gd name="adj1" fmla="val -15319"/>
-                  <a:gd name="adj2" fmla="val 120738"/>
+                  <a:gd name="adj1" fmla="val -12831"/>
+                  <a:gd name="adj2" fmla="val 120138"/>
                 </a:avLst>
               </a:prstGeom>
             </p:spPr>
@@ -43179,13 +43162,13 @@
               <a:p>
                 <a:pPr algn="ctr"/>
                 <a:r>
-                  <a:rPr lang="en-US" dirty="0"/>
+                  <a:rPr lang="en-US" sz="1600" dirty="0"/>
                   <a:t>Tradeoff constant </a:t>
                 </a:r>
                 <a14:m>
                   <m:oMath xmlns:m="http://schemas.openxmlformats.org/officeDocument/2006/math">
                     <m:r>
-                      <a:rPr lang="en-US" b="0" i="1" smtClean="0">
+                      <a:rPr lang="en-US" sz="1600" b="0" i="1" smtClean="0">
                         <a:latin typeface="Cambria Math" panose="02040503050406030204" pitchFamily="18" charset="0"/>
                       </a:rPr>
                       <m:t>≈</m:t>
@@ -43194,7 +43177,7 @@
                       <m:radPr>
                         <m:degHide m:val="on"/>
                         <m:ctrlPr>
-                          <a:rPr lang="en-US" b="0" i="1" smtClean="0">
+                          <a:rPr lang="en-US" sz="1600" b="0" i="1" smtClean="0">
                             <a:latin typeface="Cambria Math" panose="02040503050406030204" pitchFamily="18" charset="0"/>
                           </a:rPr>
                         </m:ctrlPr>
@@ -43202,7 +43185,7 @@
                       <m:deg/>
                       <m:e>
                         <m:r>
-                          <a:rPr lang="en-US" b="0" i="1" smtClean="0">
+                          <a:rPr lang="en-US" sz="1600" b="0" i="1" smtClean="0">
                             <a:latin typeface="Cambria Math" panose="02040503050406030204" pitchFamily="18" charset="0"/>
                           </a:rPr>
                           <m:t>2</m:t>
@@ -43212,17 +43195,17 @@
                   </m:oMath>
                 </a14:m>
                 <a:br>
-                  <a:rPr lang="en-US" dirty="0"/>
+                  <a:rPr lang="en-US" sz="1600" dirty="0"/>
                 </a:br>
                 <a:r>
-                  <a:rPr lang="en-US" dirty="0"/>
+                  <a:rPr lang="en-US" sz="1600" dirty="0"/>
                   <a:t>can be optimizes using experiments</a:t>
                 </a:r>
               </a:p>
             </p:txBody>
           </p:sp>
         </mc:Choice>
-        <mc:Fallback xmlns="">
+        <mc:Fallback>
           <p:sp>
             <p:nvSpPr>
               <p:cNvPr id="5" name="Speech Bubble: Rectangle 4">
@@ -43242,19 +43225,19 @@
             </p:nvSpPr>
             <p:spPr>
               <a:xfrm>
-                <a:off x="3048000" y="1770192"/>
-                <a:ext cx="3505200" cy="762000"/>
+                <a:off x="3048000" y="1465393"/>
+                <a:ext cx="3124200" cy="762000"/>
               </a:xfrm>
               <a:prstGeom prst="wedgeRectCallout">
                 <a:avLst>
-                  <a:gd name="adj1" fmla="val -15319"/>
-                  <a:gd name="adj2" fmla="val 120738"/>
+                  <a:gd name="adj1" fmla="val -12831"/>
+                  <a:gd name="adj2" fmla="val 120138"/>
                 </a:avLst>
               </a:prstGeom>
               <a:blipFill>
                 <a:blip r:embed="rId4"/>
                 <a:stretch>
-                  <a:fillRect l="-1211" r="-1211"/>
+                  <a:fillRect l="-581" r="-194"/>
                 </a:stretch>
               </a:blipFill>
             </p:spPr>
@@ -43273,8 +43256,8 @@
           </p:sp>
         </mc:Fallback>
       </mc:AlternateContent>
-      <mc:AlternateContent xmlns:mc="http://schemas.openxmlformats.org/markup-compatibility/2006" xmlns:a14="http://schemas.microsoft.com/office/drawing/2010/main">
-        <mc:Choice Requires="a14">
+      <mc:AlternateContent xmlns:mc="http://schemas.openxmlformats.org/markup-compatibility/2006">
+        <mc:Choice xmlns:a14="http://schemas.microsoft.com/office/drawing/2010/main" Requires="a14">
           <p:sp>
             <p:nvSpPr>
               <p:cNvPr id="7" name="Speech Bubble: Rectangle 6">
@@ -43292,13 +43275,13 @@
             </p:nvSpPr>
             <p:spPr>
               <a:xfrm>
-                <a:off x="3810000" y="4080797"/>
-                <a:ext cx="5105400" cy="762000"/>
+                <a:off x="3810000" y="3775997"/>
+                <a:ext cx="4953000" cy="1177003"/>
               </a:xfrm>
               <a:prstGeom prst="wedgeRectCallout">
                 <a:avLst>
-                  <a:gd name="adj1" fmla="val -5987"/>
-                  <a:gd name="adj2" fmla="val -98258"/>
+                  <a:gd name="adj1" fmla="val -11525"/>
+                  <a:gd name="adj2" fmla="val -89712"/>
                 </a:avLst>
               </a:prstGeom>
             </p:spPr>
@@ -43322,33 +43305,33 @@
               <a:p>
                 <a:pPr algn="ctr"/>
                 <a:r>
-                  <a:rPr lang="en-US" dirty="0"/>
+                  <a:rPr lang="en-US" sz="1600" dirty="0"/>
                   <a:t>High for nodes with few playouts relative to the parent node (=</a:t>
                 </a:r>
                 <a:r>
-                  <a:rPr lang="en-US" b="1" dirty="0"/>
+                  <a:rPr lang="en-US" sz="1600" b="1" dirty="0"/>
                   <a:t>exploration</a:t>
                 </a:r>
                 <a:r>
-                  <a:rPr lang="en-US" dirty="0"/>
+                  <a:rPr lang="en-US" sz="1600" dirty="0"/>
                   <a:t>). Goes to 0 for large </a:t>
                 </a:r>
                 <a14:m>
                   <m:oMath xmlns:m="http://schemas.openxmlformats.org/officeDocument/2006/math">
                     <m:r>
-                      <a:rPr lang="en-US" sz="1800" i="1" smtClean="0">
+                      <a:rPr lang="en-US" sz="1600" i="1" smtClean="0">
                         <a:latin typeface="Cambria Math" panose="02040503050406030204" pitchFamily="18" charset="0"/>
                       </a:rPr>
                       <m:t>𝑁</m:t>
                     </m:r>
                     <m:r>
-                      <a:rPr lang="en-US" sz="1800" i="1" smtClean="0">
+                      <a:rPr lang="en-US" sz="1600" i="1" smtClean="0">
                         <a:latin typeface="Cambria Math" panose="02040503050406030204" pitchFamily="18" charset="0"/>
                       </a:rPr>
                       <m:t>(</m:t>
                     </m:r>
                     <m:r>
-                      <a:rPr lang="en-US" sz="1800" i="1" smtClean="0">
+                      <a:rPr lang="en-US" sz="1600" i="1" smtClean="0">
                         <a:latin typeface="Cambria Math" panose="02040503050406030204" pitchFamily="18" charset="0"/>
                       </a:rPr>
                       <m:t>𝑛</m:t>
@@ -43356,14 +43339,14 @@
                   </m:oMath>
                 </a14:m>
                 <a:r>
-                  <a:rPr lang="en-US" dirty="0"/>
-                  <a:t>)</a:t>
+                  <a:rPr lang="en-US" sz="1600" dirty="0"/>
+                  <a:t>).  This represents the potential given limited exploration.</a:t>
                 </a:r>
               </a:p>
             </p:txBody>
           </p:sp>
         </mc:Choice>
-        <mc:Fallback xmlns="">
+        <mc:Fallback>
           <p:sp>
             <p:nvSpPr>
               <p:cNvPr id="7" name="Speech Bubble: Rectangle 6">
@@ -43383,19 +43366,19 @@
             </p:nvSpPr>
             <p:spPr>
               <a:xfrm>
-                <a:off x="3810000" y="4080797"/>
-                <a:ext cx="5105400" cy="762000"/>
+                <a:off x="3810000" y="3775997"/>
+                <a:ext cx="4953000" cy="1177003"/>
               </a:xfrm>
               <a:prstGeom prst="wedgeRectCallout">
                 <a:avLst>
-                  <a:gd name="adj1" fmla="val -5987"/>
-                  <a:gd name="adj2" fmla="val -98258"/>
+                  <a:gd name="adj1" fmla="val -11525"/>
+                  <a:gd name="adj2" fmla="val -89712"/>
                 </a:avLst>
               </a:prstGeom>
               <a:blipFill>
                 <a:blip r:embed="rId5"/>
                 <a:stretch>
-                  <a:fillRect l="-476" r="-357" b="-2116"/>
+                  <a:fillRect/>
                 </a:stretch>
               </a:blipFill>
             </p:spPr>
@@ -43748,7 +43731,15 @@
             </a:br>
             <a:r>
               <a:rPr lang="en-US" sz="2400" dirty="0"/>
-              <a:t>Playouts can start from any state (leaf node) in that tree. This means the algorithm can focus on a good sequence of moves.</a:t>
+              <a:t>(Random) playouts can start from any state (leaf node) in that tree. This means </a:t>
+            </a:r>
+            <a:r>
+              <a:rPr lang="en-US" sz="2400" b="1" dirty="0"/>
+              <a:t>the first few moves are not random </a:t>
+            </a:r>
+            <a:r>
+              <a:rPr lang="en-US" sz="2400" dirty="0"/>
+              <a:t>and algorithm can focus on a good sequence of moves.</a:t>
             </a:r>
           </a:p>
           <a:p>
@@ -45611,7 +45602,7 @@
             </a:r>
             <a:r>
               <a:rPr lang="en-US" sz="1400" dirty="0"/>
-              <a:t> over pure MCS: Selection strategically focuses search </a:t>
+              <a:t> over pure MCS: Selection strategically focuses search.</a:t>
             </a:r>
           </a:p>
         </p:txBody>

--- a/slides/05_games.pptx
+++ b/slides/05_games.pptx
@@ -5555,7 +5555,7 @@
             <a:fld id="{46E2045A-045A-4BC7-A4D3-1395440B1C3D}" type="datetimeFigureOut">
               <a:rPr lang="en-US" smtClean="0"/>
               <a:pPr/>
-              <a:t>4/6/2026</a:t>
+              <a:t>5/14/2026</a:t>
             </a:fld>
             <a:endParaRPr lang="en-US"/>
           </a:p>
@@ -42579,8 +42579,8 @@
           </a:p>
         </p:txBody>
       </p:sp>
-      <mc:AlternateContent xmlns:mc="http://schemas.openxmlformats.org/markup-compatibility/2006">
-        <mc:Choice xmlns:a14="http://schemas.microsoft.com/office/drawing/2010/main" Requires="a14">
+      <mc:AlternateContent xmlns:mc="http://schemas.openxmlformats.org/markup-compatibility/2006" xmlns:a14="http://schemas.microsoft.com/office/drawing/2010/main">
+        <mc:Choice Requires="a14">
           <p:sp>
             <p:nvSpPr>
               <p:cNvPr id="8" name="Rectangle 7">
@@ -42839,7 +42839,7 @@
             </p:txBody>
           </p:sp>
         </mc:Choice>
-        <mc:Fallback>
+        <mc:Fallback xmlns="">
           <p:sp>
             <p:nvSpPr>
               <p:cNvPr id="8" name="Rectangle 7">
@@ -42884,8 +42884,8 @@
           </p:sp>
         </mc:Fallback>
       </mc:AlternateContent>
-      <mc:AlternateContent xmlns:mc="http://schemas.openxmlformats.org/markup-compatibility/2006">
-        <mc:Choice xmlns:a14="http://schemas.microsoft.com/office/drawing/2010/main" Requires="a14">
+      <mc:AlternateContent xmlns:mc="http://schemas.openxmlformats.org/markup-compatibility/2006" xmlns:a14="http://schemas.microsoft.com/office/drawing/2010/main">
+        <mc:Choice Requires="a14">
           <p:sp>
             <p:nvSpPr>
               <p:cNvPr id="6" name="Rectangle 5">
@@ -43000,7 +43000,7 @@
             </p:txBody>
           </p:sp>
         </mc:Choice>
-        <mc:Fallback>
+        <mc:Fallback xmlns="">
           <p:sp>
             <p:nvSpPr>
               <p:cNvPr id="6" name="Rectangle 5">
@@ -43113,8 +43113,8 @@
           </a:p>
         </p:txBody>
       </p:sp>
-      <mc:AlternateContent xmlns:mc="http://schemas.openxmlformats.org/markup-compatibility/2006">
-        <mc:Choice xmlns:a14="http://schemas.microsoft.com/office/drawing/2010/main" Requires="a14">
+      <mc:AlternateContent xmlns:mc="http://schemas.openxmlformats.org/markup-compatibility/2006" xmlns:a14="http://schemas.microsoft.com/office/drawing/2010/main">
+        <mc:Choice Requires="a14">
           <p:sp>
             <p:nvSpPr>
               <p:cNvPr id="5" name="Speech Bubble: Rectangle 4">
@@ -43205,7 +43205,7 @@
             </p:txBody>
           </p:sp>
         </mc:Choice>
-        <mc:Fallback>
+        <mc:Fallback xmlns="">
           <p:sp>
             <p:nvSpPr>
               <p:cNvPr id="5" name="Speech Bubble: Rectangle 4">
@@ -43256,8 +43256,8 @@
           </p:sp>
         </mc:Fallback>
       </mc:AlternateContent>
-      <mc:AlternateContent xmlns:mc="http://schemas.openxmlformats.org/markup-compatibility/2006">
-        <mc:Choice xmlns:a14="http://schemas.microsoft.com/office/drawing/2010/main" Requires="a14">
+      <mc:AlternateContent xmlns:mc="http://schemas.openxmlformats.org/markup-compatibility/2006" xmlns:a14="http://schemas.microsoft.com/office/drawing/2010/main">
+        <mc:Choice Requires="a14">
           <p:sp>
             <p:nvSpPr>
               <p:cNvPr id="7" name="Speech Bubble: Rectangle 6">
@@ -43346,7 +43346,7 @@
             </p:txBody>
           </p:sp>
         </mc:Choice>
-        <mc:Fallback>
+        <mc:Fallback xmlns="">
           <p:sp>
             <p:nvSpPr>
               <p:cNvPr id="7" name="Speech Bubble: Rectangle 6">
@@ -49433,110 +49433,344 @@
           </a:p>
         </p:txBody>
       </p:sp>
-      <p:sp>
-        <p:nvSpPr>
-          <p:cNvPr id="3" name="Content Placeholder 2">
-            <a:extLst>
-              <a:ext uri="{FF2B5EF4-FFF2-40B4-BE49-F238E27FC236}">
-                <a16:creationId xmlns:a16="http://schemas.microsoft.com/office/drawing/2014/main" id="{48CCB962-4D43-8FB6-E8E6-221BA64813C6}"/>
-              </a:ext>
-            </a:extLst>
-          </p:cNvPr>
-          <p:cNvSpPr>
-            <a:spLocks noGrp="1"/>
-          </p:cNvSpPr>
-          <p:nvPr>
-            <p:ph idx="1"/>
-          </p:nvPr>
-        </p:nvSpPr>
-        <p:spPr/>
-        <p:txBody>
-          <a:bodyPr>
-            <a:normAutofit fontScale="85000" lnSpcReduction="20000"/>
-          </a:bodyPr>
-          <a:lstStyle/>
-          <a:p>
-            <a:r>
-              <a:rPr lang="en-US" dirty="0"/>
-              <a:t>Making a move is a </a:t>
-            </a:r>
-            <a:r>
-              <a:rPr lang="en-US" b="1" dirty="0"/>
-              <a:t>decision problem</a:t>
-            </a:r>
-            <a:r>
-              <a:rPr lang="en-US" dirty="0"/>
-              <a:t> that can be addressed as a</a:t>
-            </a:r>
-            <a:r>
-              <a:rPr lang="en-US" sz="2800" dirty="0"/>
-              <a:t> </a:t>
-            </a:r>
-            <a:r>
-              <a:rPr lang="en-US" sz="2800" b="1" dirty="0"/>
-              <a:t>search problem. </a:t>
-            </a:r>
-            <a:r>
-              <a:rPr lang="en-US" sz="2800" dirty="0"/>
-              <a:t>We need to search for sequences of moves that lead to a winning position.</a:t>
-            </a:r>
-            <a:endParaRPr lang="en-US" sz="2800" b="1" dirty="0"/>
-          </a:p>
-          <a:p>
-            <a:endParaRPr lang="en-US" sz="2800" b="1" dirty="0"/>
-          </a:p>
-          <a:p>
-            <a:r>
-              <a:rPr lang="en-US" sz="2800" b="1" dirty="0"/>
-              <a:t>Search p</a:t>
-            </a:r>
-            <a:r>
-              <a:rPr lang="en-US" b="1" dirty="0"/>
-              <a:t>roblems have a s</a:t>
-            </a:r>
-            <a:r>
-              <a:rPr lang="en-US" sz="2800" b="1" dirty="0"/>
-              <a:t>tate space</a:t>
-            </a:r>
-            <a:r>
-              <a:rPr lang="en-US" sz="2800" dirty="0"/>
-              <a:t>: a graph defined by the initial state and the transition function containing all reachable states (e.g., chess positions).</a:t>
-            </a:r>
-          </a:p>
-          <a:p>
-            <a:endParaRPr lang="en-US" sz="2800" b="1" dirty="0"/>
-          </a:p>
-          <a:p>
-            <a:r>
-              <a:rPr lang="en-US" sz="2800" b="1" dirty="0"/>
-              <a:t>The search tree </a:t>
-            </a:r>
-            <a:r>
-              <a:rPr lang="en-US" b="1" dirty="0"/>
-              <a:t>i</a:t>
-            </a:r>
-            <a:r>
-              <a:rPr lang="en-US" sz="2800" b="1" dirty="0"/>
-              <a:t>s called game tree:</a:t>
-            </a:r>
-            <a:r>
-              <a:rPr lang="en-US" sz="2800" dirty="0"/>
-              <a:t> A complete game tree follows every sequence from the current state to the end of the game (the terminal state). It consists of the set of paths through the state space representing </a:t>
-            </a:r>
-            <a:r>
-              <a:rPr lang="en-US" sz="2800" b="1" dirty="0"/>
-              <a:t>all</a:t>
-            </a:r>
-            <a:r>
-              <a:rPr lang="en-US" sz="2800" dirty="0"/>
-              <a:t> possible games that can be played.</a:t>
-            </a:r>
-          </a:p>
-          <a:p>
-            <a:endParaRPr lang="en-US" dirty="0"/>
-          </a:p>
-        </p:txBody>
-      </p:sp>
+      <mc:AlternateContent xmlns:mc="http://schemas.openxmlformats.org/markup-compatibility/2006" xmlns:a14="http://schemas.microsoft.com/office/drawing/2010/main">
+        <mc:Choice Requires="a14">
+          <p:sp>
+            <p:nvSpPr>
+              <p:cNvPr id="3" name="Content Placeholder 2">
+                <a:extLst>
+                  <a:ext uri="{FF2B5EF4-FFF2-40B4-BE49-F238E27FC236}">
+                    <a16:creationId xmlns:a16="http://schemas.microsoft.com/office/drawing/2014/main" id="{48CCB962-4D43-8FB6-E8E6-221BA64813C6}"/>
+                  </a:ext>
+                </a:extLst>
+              </p:cNvPr>
+              <p:cNvSpPr>
+                <a:spLocks noGrp="1"/>
+              </p:cNvSpPr>
+              <p:nvPr>
+                <p:ph idx="1"/>
+              </p:nvPr>
+            </p:nvSpPr>
+            <p:spPr>
+              <a:xfrm>
+                <a:off x="628650" y="1825624"/>
+                <a:ext cx="7886700" cy="4667249"/>
+              </a:xfrm>
+            </p:spPr>
+            <p:txBody>
+              <a:bodyPr>
+                <a:normAutofit fontScale="70000" lnSpcReduction="20000"/>
+              </a:bodyPr>
+              <a:lstStyle/>
+              <a:p>
+                <a:r>
+                  <a:rPr lang="en-US" dirty="0"/>
+                  <a:t>Making a move is a </a:t>
+                </a:r>
+                <a:r>
+                  <a:rPr lang="en-US" b="1" dirty="0"/>
+                  <a:t>decision problem</a:t>
+                </a:r>
+                <a:r>
+                  <a:rPr lang="en-US" dirty="0"/>
+                  <a:t> that can be addressed as a</a:t>
+                </a:r>
+                <a:r>
+                  <a:rPr lang="en-US" sz="2800" dirty="0"/>
+                  <a:t> </a:t>
+                </a:r>
+                <a:r>
+                  <a:rPr lang="en-US" sz="2800" b="1" dirty="0"/>
+                  <a:t>search problem. </a:t>
+                </a:r>
+                <a:r>
+                  <a:rPr lang="en-US" sz="2800" dirty="0"/>
+                  <a:t>We need to search for sequences of moves that lead to a winning position.</a:t>
+                </a:r>
+                <a:endParaRPr lang="en-US" sz="2800" b="1" dirty="0"/>
+              </a:p>
+              <a:p>
+                <a:endParaRPr lang="en-US" sz="2800" b="1" dirty="0"/>
+              </a:p>
+              <a:p>
+                <a:r>
+                  <a:rPr lang="en-US" sz="2800" b="1" dirty="0"/>
+                  <a:t>State Space: </a:t>
+                </a:r>
+                <a:r>
+                  <a:rPr lang="en-US" sz="2800" dirty="0"/>
+                  <a:t>a graph defined by the initial state and the transition function containing all reachable states (e.g., chess positions).</a:t>
+                </a:r>
+              </a:p>
+              <a:p>
+                <a:endParaRPr lang="en-US" sz="2800" b="1" dirty="0"/>
+              </a:p>
+              <a:p>
+                <a:r>
+                  <a:rPr lang="en-US" sz="2800" b="1" dirty="0"/>
+                  <a:t>Game Tree: </a:t>
+                </a:r>
+                <a:r>
+                  <a:rPr lang="en-US" sz="2800" dirty="0"/>
+                  <a:t>The search tree </a:t>
+                </a:r>
+                <a:r>
+                  <a:rPr lang="en-US" dirty="0"/>
+                  <a:t>i</a:t>
+                </a:r>
+                <a:r>
+                  <a:rPr lang="en-US" sz="2800" dirty="0"/>
+                  <a:t>s called a game tree. A complete game tree follows every sequence from the current state to the end of the game (the terminal state). It consists of the set of paths through the state space representing </a:t>
+                </a:r>
+                <a:r>
+                  <a:rPr lang="en-US" sz="2800" b="1" dirty="0"/>
+                  <a:t>all</a:t>
+                </a:r>
+                <a:r>
+                  <a:rPr lang="en-US" sz="2800" dirty="0"/>
+                  <a:t> possible games that can be played.</a:t>
+                </a:r>
+                <a:br>
+                  <a:rPr lang="en-US" sz="2800" dirty="0"/>
+                </a:br>
+                <a:br>
+                  <a:rPr lang="en-US" sz="2800" dirty="0"/>
+                </a:br>
+                <a:r>
+                  <a:rPr lang="en-US" sz="2800" b="1" dirty="0"/>
+                  <a:t>Note</a:t>
+                </a:r>
+                <a:r>
+                  <a:rPr lang="en-US" sz="2800" dirty="0"/>
+                  <a:t>: The game tree contains all redundant paths! It is equivalent to the search tree traversed by depth-first search (DFS). It’s worst-case size is</a:t>
+                </a:r>
+                <a:br>
+                  <a:rPr lang="en-US" sz="2800" dirty="0"/>
+                </a:br>
+                <a:br>
+                  <a:rPr lang="en-US" sz="2800" b="0" i="1" dirty="0">
+                    <a:latin typeface="Cambria Math" panose="02040503050406030204" pitchFamily="18" charset="0"/>
+                  </a:rPr>
+                </a:br>
+                <a14:m>
+                  <m:oMath xmlns:m="http://schemas.openxmlformats.org/officeDocument/2006/math">
+                    <m:r>
+                      <a:rPr lang="en-US" sz="2800" b="0" i="1" smtClean="0">
+                        <a:latin typeface="Cambria Math" panose="02040503050406030204" pitchFamily="18" charset="0"/>
+                      </a:rPr>
+                      <m:t>𝑂</m:t>
+                    </m:r>
+                    <m:d>
+                      <m:dPr>
+                        <m:ctrlPr>
+                          <a:rPr lang="en-US" sz="2800" b="0" i="1" smtClean="0">
+                            <a:latin typeface="Cambria Math" panose="02040503050406030204" pitchFamily="18" charset="0"/>
+                          </a:rPr>
+                        </m:ctrlPr>
+                      </m:dPr>
+                      <m:e>
+                        <m:sSup>
+                          <m:sSupPr>
+                            <m:ctrlPr>
+                              <a:rPr lang="en-US" sz="2800" b="0" i="1" smtClean="0">
+                                <a:latin typeface="Cambria Math" panose="02040503050406030204" pitchFamily="18" charset="0"/>
+                              </a:rPr>
+                            </m:ctrlPr>
+                          </m:sSupPr>
+                          <m:e>
+                            <m:r>
+                              <a:rPr lang="en-US" sz="2800" b="0" i="1" smtClean="0">
+                                <a:latin typeface="Cambria Math" panose="02040503050406030204" pitchFamily="18" charset="0"/>
+                              </a:rPr>
+                              <m:t>𝑏</m:t>
+                            </m:r>
+                          </m:e>
+                          <m:sup>
+                            <m:r>
+                              <a:rPr lang="en-US" sz="2800" b="0" i="1" smtClean="0">
+                                <a:latin typeface="Cambria Math" panose="02040503050406030204" pitchFamily="18" charset="0"/>
+                              </a:rPr>
+                              <m:t>𝑚</m:t>
+                            </m:r>
+                          </m:sup>
+                        </m:sSup>
+                      </m:e>
+                    </m:d>
+                  </m:oMath>
+                </a14:m>
+                <a:endParaRPr lang="en-US" sz="2800" dirty="0"/>
+              </a:p>
+            </p:txBody>
+          </p:sp>
+        </mc:Choice>
+        <mc:Fallback xmlns="">
+          <p:sp>
+            <p:nvSpPr>
+              <p:cNvPr id="3" name="Content Placeholder 2">
+                <a:extLst>
+                  <a:ext uri="{FF2B5EF4-FFF2-40B4-BE49-F238E27FC236}">
+                    <a16:creationId xmlns:a16="http://schemas.microsoft.com/office/drawing/2014/main" id="{48CCB962-4D43-8FB6-E8E6-221BA64813C6}"/>
+                  </a:ext>
+                </a:extLst>
+              </p:cNvPr>
+              <p:cNvSpPr>
+                <a:spLocks noGrp="1" noRot="1" noChangeAspect="1" noMove="1" noResize="1" noEditPoints="1" noAdjustHandles="1" noChangeArrowheads="1" noChangeShapeType="1" noTextEdit="1"/>
+              </p:cNvSpPr>
+              <p:nvPr>
+                <p:ph idx="1"/>
+              </p:nvPr>
+            </p:nvSpPr>
+            <p:spPr>
+              <a:xfrm>
+                <a:off x="628650" y="1825624"/>
+                <a:ext cx="7886700" cy="4667249"/>
+              </a:xfrm>
+              <a:blipFill>
+                <a:blip r:embed="rId2"/>
+                <a:stretch>
+                  <a:fillRect l="-696" t="-2350" r="-1314"/>
+                </a:stretch>
+              </a:blipFill>
+            </p:spPr>
+            <p:txBody>
+              <a:bodyPr/>
+              <a:lstStyle/>
+              <a:p>
+                <a:r>
+                  <a:rPr lang="en-US">
+                    <a:noFill/>
+                  </a:rPr>
+                  <a:t> </a:t>
+                </a:r>
+              </a:p>
+            </p:txBody>
+          </p:sp>
+        </mc:Fallback>
+      </mc:AlternateContent>
+      <mc:AlternateContent xmlns:mc="http://schemas.openxmlformats.org/markup-compatibility/2006" xmlns:a14="http://schemas.microsoft.com/office/drawing/2010/main">
+        <mc:Choice Requires="a14">
+          <p:sp>
+            <p:nvSpPr>
+              <p:cNvPr id="4" name="TextBox 3">
+                <a:extLst>
+                  <a:ext uri="{FF2B5EF4-FFF2-40B4-BE49-F238E27FC236}">
+                    <a16:creationId xmlns:a16="http://schemas.microsoft.com/office/drawing/2014/main" id="{F709AE17-04C1-20DB-390C-6ACC52882FC2}"/>
+                  </a:ext>
+                </a:extLst>
+              </p:cNvPr>
+              <p:cNvSpPr txBox="1"/>
+              <p:nvPr/>
+            </p:nvSpPr>
+            <p:spPr>
+              <a:xfrm>
+                <a:off x="5867400" y="5638800"/>
+                <a:ext cx="2647950" cy="646331"/>
+              </a:xfrm>
+              <a:prstGeom prst="rect">
+                <a:avLst/>
+              </a:prstGeom>
+            </p:spPr>
+            <p:style>
+              <a:lnRef idx="2">
+                <a:schemeClr val="accent3">
+                  <a:shade val="15000"/>
+                </a:schemeClr>
+              </a:lnRef>
+              <a:fillRef idx="1">
+                <a:schemeClr val="accent3"/>
+              </a:fillRef>
+              <a:effectRef idx="0">
+                <a:schemeClr val="accent3"/>
+              </a:effectRef>
+              <a:fontRef idx="minor">
+                <a:schemeClr val="lt1"/>
+              </a:fontRef>
+            </p:style>
+            <p:txBody>
+              <a:bodyPr wrap="square" rtlCol="0">
+                <a:spAutoFit/>
+              </a:bodyPr>
+              <a:lstStyle/>
+              <a:p>
+                <a14:m>
+                  <m:oMath xmlns:m="http://schemas.openxmlformats.org/officeDocument/2006/math">
+                    <m:r>
+                      <a:rPr lang="en-US" b="0" i="1" smtClean="0">
+                        <a:latin typeface="Cambria Math" panose="02040503050406030204" pitchFamily="18" charset="0"/>
+                      </a:rPr>
+                      <m:t>𝑏</m:t>
+                    </m:r>
+                  </m:oMath>
+                </a14:m>
+                <a:r>
+                  <a:rPr lang="en-US" dirty="0"/>
+                  <a:t>… max. branching factor</a:t>
+                </a:r>
+              </a:p>
+              <a:p>
+                <a14:m>
+                  <m:oMath xmlns:m="http://schemas.openxmlformats.org/officeDocument/2006/math">
+                    <m:r>
+                      <a:rPr lang="en-US" b="0" i="1" smtClean="0">
+                        <a:latin typeface="Cambria Math" panose="02040503050406030204" pitchFamily="18" charset="0"/>
+                      </a:rPr>
+                      <m:t>𝑚</m:t>
+                    </m:r>
+                  </m:oMath>
+                </a14:m>
+                <a:r>
+                  <a:rPr lang="en-US" dirty="0"/>
+                  <a:t> … Max tree depth</a:t>
+                </a:r>
+              </a:p>
+            </p:txBody>
+          </p:sp>
+        </mc:Choice>
+        <mc:Fallback xmlns="">
+          <p:sp>
+            <p:nvSpPr>
+              <p:cNvPr id="4" name="TextBox 3">
+                <a:extLst>
+                  <a:ext uri="{FF2B5EF4-FFF2-40B4-BE49-F238E27FC236}">
+                    <a16:creationId xmlns:a16="http://schemas.microsoft.com/office/drawing/2014/main" id="{F709AE17-04C1-20DB-390C-6ACC52882FC2}"/>
+                  </a:ext>
+                </a:extLst>
+              </p:cNvPr>
+              <p:cNvSpPr txBox="1">
+                <a:spLocks noRot="1" noChangeAspect="1" noMove="1" noResize="1" noEditPoints="1" noAdjustHandles="1" noChangeArrowheads="1" noChangeShapeType="1" noTextEdit="1"/>
+              </p:cNvSpPr>
+              <p:nvPr/>
+            </p:nvSpPr>
+            <p:spPr>
+              <a:xfrm>
+                <a:off x="5867400" y="5638800"/>
+                <a:ext cx="2647950" cy="646331"/>
+              </a:xfrm>
+              <a:prstGeom prst="rect">
+                <a:avLst/>
+              </a:prstGeom>
+              <a:blipFill>
+                <a:blip r:embed="rId3"/>
+                <a:stretch>
+                  <a:fillRect t="-3704" b="-12963"/>
+                </a:stretch>
+              </a:blipFill>
+            </p:spPr>
+            <p:txBody>
+              <a:bodyPr/>
+              <a:lstStyle/>
+              <a:p>
+                <a:r>
+                  <a:rPr lang="en-US">
+                    <a:noFill/>
+                  </a:rPr>
+                  <a:t> </a:t>
+                </a:r>
+              </a:p>
+            </p:txBody>
+          </p:sp>
+        </mc:Fallback>
+      </mc:AlternateContent>
     </p:spTree>
     <p:extLst>
       <p:ext uri="{BB962C8B-B14F-4D97-AF65-F5344CB8AC3E}">
@@ -50511,8 +50745,8 @@
           </a:p>
         </p:txBody>
       </p:sp>
-      <mc:AlternateContent xmlns:mc="http://schemas.openxmlformats.org/markup-compatibility/2006" xmlns:a14="http://schemas.microsoft.com/office/drawing/2010/main">
-        <mc:Choice Requires="a14">
+      <mc:AlternateContent xmlns:mc="http://schemas.openxmlformats.org/markup-compatibility/2006">
+        <mc:Choice xmlns:a14="http://schemas.microsoft.com/office/drawing/2010/main" Requires="a14">
           <p:sp>
             <p:nvSpPr>
               <p:cNvPr id="3" name="TextBox 2">
@@ -50527,8 +50761,8 @@
             </p:nvSpPr>
             <p:spPr>
               <a:xfrm>
-                <a:off x="5524076" y="3733848"/>
-                <a:ext cx="3470955" cy="3046988"/>
+                <a:off x="5395695" y="3797855"/>
+                <a:ext cx="3443506" cy="2893100"/>
               </a:xfrm>
               <a:prstGeom prst="rect">
                 <a:avLst/>
@@ -50555,19 +50789,19 @@
               <a:lstStyle/>
               <a:p>
                 <a:r>
-                  <a:rPr lang="en-US" sz="1600" dirty="0">
+                  <a:rPr lang="en-US" sz="1400" dirty="0">
                     <a:latin typeface="Cambria Math" panose="02040503050406030204" pitchFamily="18" charset="0"/>
                   </a:rPr>
                   <a:t>The </a:t>
                 </a:r>
                 <a:r>
-                  <a:rPr lang="en-US" sz="1600" b="1" dirty="0">
+                  <a:rPr lang="en-US" sz="1400" b="1" dirty="0">
                     <a:latin typeface="Cambria Math" panose="02040503050406030204" pitchFamily="18" charset="0"/>
                   </a:rPr>
                   <a:t>state space </a:t>
                 </a:r>
                 <a:r>
-                  <a:rPr lang="en-US" sz="1600" dirty="0">
+                  <a:rPr lang="en-US" sz="1400" dirty="0">
                     <a:latin typeface="Cambria Math" panose="02040503050406030204" pitchFamily="18" charset="0"/>
                   </a:rPr>
                   <a:t>size (number of possible boards) is much smaller than:</a:t>
@@ -50580,14 +50814,14 @@
                     <m:sSup>
                       <m:sSupPr>
                         <m:ctrlPr>
-                          <a:rPr lang="en-US" sz="1600" b="0" i="1" smtClean="0">
+                          <a:rPr lang="en-US" sz="1400" b="0" i="1" smtClean="0">
                             <a:latin typeface="Cambria Math" panose="02040503050406030204" pitchFamily="18" charset="0"/>
                           </a:rPr>
                         </m:ctrlPr>
                       </m:sSupPr>
                       <m:e>
                         <m:r>
-                          <a:rPr lang="en-US" sz="1600" b="0" i="1" smtClean="0">
+                          <a:rPr lang="en-US" sz="1400" b="0" i="1" smtClean="0">
                             <a:latin typeface="Cambria Math" panose="02040503050406030204" pitchFamily="18" charset="0"/>
                           </a:rPr>
                           <m:t>3</m:t>
@@ -50595,7 +50829,7 @@
                       </m:e>
                       <m:sup>
                         <m:r>
-                          <a:rPr lang="en-US" sz="1600" b="0" i="1" smtClean="0">
+                          <a:rPr lang="en-US" sz="1400" b="0" i="1" smtClean="0">
                             <a:latin typeface="Cambria Math" panose="02040503050406030204" pitchFamily="18" charset="0"/>
                           </a:rPr>
                           <m:t>9</m:t>
@@ -50603,19 +50837,19 @@
                       </m:sup>
                     </m:sSup>
                     <m:r>
-                      <a:rPr lang="en-US" sz="1600" i="1">
+                      <a:rPr lang="en-US" sz="1400" i="1">
                         <a:latin typeface="Cambria Math" panose="02040503050406030204" pitchFamily="18" charset="0"/>
                       </a:rPr>
                       <m:t>=19</m:t>
                     </m:r>
                     <m:r>
-                      <a:rPr lang="en-US" sz="1600" b="0" i="1" smtClean="0">
+                      <a:rPr lang="en-US" sz="1400" b="0" i="1" smtClean="0">
                         <a:latin typeface="Cambria Math" panose="02040503050406030204" pitchFamily="18" charset="0"/>
                       </a:rPr>
                       <m:t>,</m:t>
                     </m:r>
                     <m:r>
-                      <a:rPr lang="en-US" sz="1600" i="1">
+                      <a:rPr lang="en-US" sz="1400" i="1">
                         <a:latin typeface="Cambria Math" panose="02040503050406030204" pitchFamily="18" charset="0"/>
                       </a:rPr>
                       <m:t>683</m:t>
@@ -50623,43 +50857,43 @@
                   </m:oMath>
                 </a14:m>
                 <a:r>
-                  <a:rPr lang="en-US" sz="1600" dirty="0">
+                  <a:rPr lang="en-US" sz="1400" dirty="0">
                     <a:latin typeface="Cambria Math" panose="02040503050406030204" pitchFamily="18" charset="0"/>
                   </a:rPr>
                   <a:t> states.</a:t>
                 </a:r>
               </a:p>
               <a:p>
-                <a:endParaRPr lang="en-US" sz="1600" dirty="0">
+                <a:endParaRPr lang="en-US" sz="1400" dirty="0">
                   <a:latin typeface="Cambria Math" panose="02040503050406030204" pitchFamily="18" charset="0"/>
                 </a:endParaRPr>
               </a:p>
               <a:p>
                 <a:r>
-                  <a:rPr lang="en-US" sz="1600" dirty="0">
+                  <a:rPr lang="en-US" sz="1400" dirty="0">
                     <a:latin typeface="Cambria Math" panose="02040503050406030204" pitchFamily="18" charset="0"/>
                   </a:rPr>
                   <a:t>However, t</a:t>
                 </a:r>
                 <a:r>
-                  <a:rPr lang="en-US" sz="1600" dirty="0"/>
+                  <a:rPr lang="en-US" sz="1400" dirty="0"/>
                   <a:t>he complete </a:t>
                 </a:r>
                 <a:r>
-                  <a:rPr lang="en-US" sz="1600" b="1" dirty="0"/>
+                  <a:rPr lang="en-US" sz="1400" b="1" dirty="0"/>
                   <a:t>game tree </a:t>
                 </a:r>
                 <a:r>
-                  <a:rPr lang="en-US" sz="1600" dirty="0"/>
+                  <a:rPr lang="en-US" sz="1400" dirty="0"/>
                   <a:t>is much larger because the same state (board) can be reached in different subtrees (</a:t>
                 </a:r>
                 <a:r>
-                  <a:rPr lang="en-US" sz="1600" b="1" dirty="0"/>
+                  <a:rPr lang="en-US" sz="1400" b="1" dirty="0"/>
                   <a:t>redundant paths</a:t>
                 </a:r>
                 <a:r>
-                  <a:rPr lang="en-US" sz="1600" dirty="0"/>
-                  <a:t>). The game tree here is a little smaller than:</a:t>
+                  <a:rPr lang="en-US" sz="1400" dirty="0"/>
+                  <a:t>). The branching factor goes down by one for every level, so the tree size is a little smaller than:</a:t>
                 </a:r>
               </a:p>
               <a:p>
@@ -50671,13 +50905,13 @@
                     </m:oMathParaPr>
                     <m:oMath xmlns:m="http://schemas.openxmlformats.org/officeDocument/2006/math">
                       <m:r>
-                        <a:rPr lang="en-US" sz="1600" b="0" i="0" smtClean="0">
+                        <a:rPr lang="en-US" sz="1400" b="0" i="0" smtClean="0">
                           <a:latin typeface="Cambria Math" panose="02040503050406030204" pitchFamily="18" charset="0"/>
                         </a:rPr>
                         <m:t>1</m:t>
                       </m:r>
                       <m:r>
-                        <a:rPr lang="en-US" sz="1600" b="0" i="1" smtClean="0">
+                        <a:rPr lang="en-US" sz="1400" b="0" i="1" smtClean="0">
                           <a:latin typeface="Cambria Math" panose="02040503050406030204" pitchFamily="18" charset="0"/>
                         </a:rPr>
                         <m:t>+</m:t>
@@ -50685,14 +50919,14 @@
                       <m:d>
                         <m:dPr>
                           <m:ctrlPr>
-                            <a:rPr lang="en-US" sz="1600" b="0" i="1" smtClean="0">
+                            <a:rPr lang="en-US" sz="1400" b="0" i="1" smtClean="0">
                               <a:latin typeface="Cambria Math" panose="02040503050406030204" pitchFamily="18" charset="0"/>
                             </a:rPr>
                           </m:ctrlPr>
                         </m:dPr>
                         <m:e>
                           <m:r>
-                            <a:rPr lang="en-US" sz="1600" b="0" i="1" smtClean="0">
+                            <a:rPr lang="en-US" sz="1400" b="0" i="1" smtClean="0">
                               <a:latin typeface="Cambria Math" panose="02040503050406030204" pitchFamily="18" charset="0"/>
                             </a:rPr>
                             <m:t>9× 8</m:t>
@@ -50700,7 +50934,7 @@
                         </m:e>
                       </m:d>
                       <m:r>
-                        <a:rPr lang="en-US" sz="1600" b="0" i="1" smtClean="0">
+                        <a:rPr lang="en-US" sz="1400" b="0" i="1" smtClean="0">
                           <a:latin typeface="Cambria Math" panose="02040503050406030204" pitchFamily="18" charset="0"/>
                         </a:rPr>
                         <m:t>+</m:t>
@@ -50708,14 +50942,14 @@
                       <m:d>
                         <m:dPr>
                           <m:ctrlPr>
-                            <a:rPr lang="en-US" sz="1600" b="0" i="1" smtClean="0">
+                            <a:rPr lang="en-US" sz="1400" b="0" i="1" smtClean="0">
                               <a:latin typeface="Cambria Math" panose="02040503050406030204" pitchFamily="18" charset="0"/>
                             </a:rPr>
                           </m:ctrlPr>
                         </m:dPr>
                         <m:e>
                           <m:r>
-                            <a:rPr lang="en-US" sz="1600" b="0" i="1" smtClean="0">
+                            <a:rPr lang="en-US" sz="1400" b="0" i="1" smtClean="0">
                               <a:latin typeface="Cambria Math" panose="02040503050406030204" pitchFamily="18" charset="0"/>
                             </a:rPr>
                             <m:t>9×8×7</m:t>
@@ -50723,7 +50957,7 @@
                         </m:e>
                       </m:d>
                       <m:r>
-                        <a:rPr lang="en-US" sz="1600" b="0" i="1" smtClean="0">
+                        <a:rPr lang="en-US" sz="1400" b="0" i="1" smtClean="0">
                           <a:latin typeface="Cambria Math" panose="02040503050406030204" pitchFamily="18" charset="0"/>
                         </a:rPr>
                         <m:t>+…</m:t>
@@ -50731,14 +50965,14 @@
                       <m:d>
                         <m:dPr>
                           <m:ctrlPr>
-                            <a:rPr lang="en-US" sz="1600" b="0" i="1" smtClean="0">
+                            <a:rPr lang="en-US" sz="1400" b="0" i="1" smtClean="0">
                               <a:latin typeface="Cambria Math" panose="02040503050406030204" pitchFamily="18" charset="0"/>
                             </a:rPr>
                           </m:ctrlPr>
                         </m:dPr>
                         <m:e>
                           <m:r>
-                            <a:rPr lang="en-US" sz="1600" i="1">
+                            <a:rPr lang="en-US" sz="1400" i="1">
                               <a:latin typeface="Cambria Math" panose="02040503050406030204" pitchFamily="18" charset="0"/>
                             </a:rPr>
                             <m:t>9!</m:t>
@@ -50749,14 +50983,14 @@
                   </m:oMathPara>
                 </a14:m>
                 <a:br>
-                  <a:rPr lang="en-US" sz="1600" i="1" dirty="0">
+                  <a:rPr lang="en-US" sz="1400" i="1" dirty="0">
                     <a:latin typeface="Cambria Math" panose="02040503050406030204" pitchFamily="18" charset="0"/>
                   </a:rPr>
                 </a:br>
                 <a14:m>
                   <m:oMath xmlns:m="http://schemas.openxmlformats.org/officeDocument/2006/math">
                     <m:r>
-                      <a:rPr lang="en-US" sz="1600" i="1">
+                      <a:rPr lang="en-US" sz="1400" i="1">
                         <a:latin typeface="Cambria Math" panose="02040503050406030204" pitchFamily="18" charset="0"/>
                       </a:rPr>
                       <m:t>=</m:t>
@@ -50765,20 +50999,48 @@
                       <m:rPr>
                         <m:nor/>
                       </m:rPr>
-                      <a:rPr lang="en-US" sz="1600" dirty="0"/>
+                      <a:rPr lang="en-US" sz="1400" dirty="0"/>
                       <m:t>986,409</m:t>
                     </m:r>
                   </m:oMath>
                 </a14:m>
                 <a:r>
-                  <a:rPr lang="en-US" sz="1600" dirty="0"/>
+                  <a:rPr lang="en-US" sz="1400" dirty="0"/>
                   <a:t> nodes</a:t>
                 </a:r>
+              </a:p>
+              <a:p>
+                <a:pPr/>
+                <a:r>
+                  <a:rPr lang="en-US" sz="1400" b="1" dirty="0"/>
+                  <a:t>Note</a:t>
+                </a:r>
+                <a:r>
+                  <a:rPr lang="en-US" sz="1400" dirty="0"/>
+                  <a:t>: The dominating term leads to </a:t>
+                </a:r>
+                <a14:m>
+                  <m:oMath xmlns:m="http://schemas.openxmlformats.org/officeDocument/2006/math">
+                    <m:r>
+                      <a:rPr lang="en-US" sz="1400" b="0" i="1" smtClean="0">
+                        <a:latin typeface="Cambria Math" panose="02040503050406030204" pitchFamily="18" charset="0"/>
+                      </a:rPr>
+                      <m:t>𝑂</m:t>
+                    </m:r>
+                    <m:r>
+                      <a:rPr lang="en-US" sz="1400" b="0" i="1" smtClean="0">
+                        <a:latin typeface="Cambria Math" panose="02040503050406030204" pitchFamily="18" charset="0"/>
+                      </a:rPr>
+                      <m:t>(9!)</m:t>
+                    </m:r>
+                  </m:oMath>
+                </a14:m>
+                <a:endParaRPr lang="en-US" sz="1400" dirty="0"/>
               </a:p>
             </p:txBody>
           </p:sp>
         </mc:Choice>
-        <mc:Fallback xmlns="">
+        <mc:Fallback>
           <p:sp>
             <p:nvSpPr>
               <p:cNvPr id="3" name="TextBox 2">
@@ -50795,8 +51057,8 @@
             </p:nvSpPr>
             <p:spPr>
               <a:xfrm>
-                <a:off x="5524076" y="3733848"/>
-                <a:ext cx="3470955" cy="3046988"/>
+                <a:off x="5395695" y="3797855"/>
+                <a:ext cx="3443506" cy="2893100"/>
               </a:xfrm>
               <a:prstGeom prst="rect">
                 <a:avLst/>
@@ -50804,7 +51066,7 @@
               <a:blipFill>
                 <a:blip r:embed="rId4"/>
                 <a:stretch>
-                  <a:fillRect l="-698" t="-598" b="-1394"/>
+                  <a:fillRect l="-352" t="-418" r="-880" b="-837"/>
                 </a:stretch>
               </a:blipFill>
             </p:spPr>
